--- a/dist/초2/과학/생물과변화/초2_과학_생물과변화_02_계절과동식물.pptx
+++ b/dist/초2/과학/생물과변화/초2_과학_생물과변화_02_계절과동식물.pptx
@@ -119,19 +119,19 @@
   <p:extLst>
     <p:ext uri="{521415D9-36F7-43E2-AB2F-B90AF26B5E84}">
       <p14:sectionLst xmlns:p14="http://schemas.microsoft.com/office/powerpoint/2010/main">
-        <p14:section name="도입" id="{2f8938c7-2ffd-de3a-aac9-2fcfab514ed3}">
+        <p14:section name="도입" id="{91426563-1ba8-b62a-dc09-938478c3051f}">
           <p14:sldIdLst>
             <p14:sldId id="256"/>
             <p14:sldId id="257"/>
           </p14:sldIdLst>
         </p14:section>
-        <p14:section name="개념" id="{bc209e1c-a00c-5965-bfa6-6fb12b1cc02d}">
+        <p14:section name="개념" id="{9edb453f-e877-16c2-a79a-d06076a0a58b}">
           <p14:sldIdLst>
             <p14:sldId id="258"/>
             <p14:sldId id="261"/>
           </p14:sldIdLst>
         </p14:section>
-        <p14:section name="연습" id="{e7abcf9c-6a6f-819a-57b6-2d45fa7c3324}">
+        <p14:section name="연습" id="{55a51bdb-4fe9-1872-61a4-e522454d350e}">
           <p14:sldIdLst>
             <p14:sldId id="259"/>
             <p14:sldId id="260"/>
@@ -140,24 +140,24 @@
             <p14:sldId id="264"/>
           </p14:sldIdLst>
         </p14:section>
-        <p14:section name="개념" id="{ebef8929-1269-fc5f-2783-f602ac414e63}">
+        <p14:section name="개념" id="{bddfab82-992e-22a5-9b4e-0fe3860724fe}">
           <p14:sldIdLst/>
         </p14:section>
-        <p14:section name="연습" id="{3360d4b2-405a-1a5e-7b3f-8b85f0afa447}">
+        <p14:section name="연습" id="{05e305b1-19d3-0b0e-cb3f-73dd57c6394f}">
           <p14:sldIdLst/>
         </p14:section>
-        <p14:section name="확인" id="{b430a425-c155-48e2-acb2-6b97a75f534a}">
+        <p14:section name="확인" id="{2f5f9039-c7c2-79ac-5760-fdaefa7ff810}">
           <p14:sldIdLst>
             <p14:sldId id="265"/>
             <p14:sldId id="266"/>
           </p14:sldIdLst>
         </p14:section>
-        <p14:section name="정리" id="{26558865-4e3b-3b9c-c415-f0ed96c69654}">
+        <p14:section name="정리" id="{05a8267e-4cb4-6470-f15f-bc5d2bc94bd4}">
           <p14:sldIdLst>
             <p14:sldId id="267"/>
           </p14:sldIdLst>
         </p14:section>
-        <p14:section name="보충" id="{fa69a092-8eb1-e3af-0ed6-1ac7215a046b}">
+        <p14:section name="보충" id="{8b65b155-e4a6-4304-b6f4-1ed4b593d68c}">
           <p14:sldIdLst>
             <p14:sldId id="268"/>
           </p14:sldIdLst>
